--- a/index/designs/y8-l15/l2-distance-li/l2-distance-li.pptx
+++ b/index/designs/y8-l15/l2-distance-li/l2-distance-li.pptx
@@ -8543,7 +8543,7 @@
       </p:sp>
       <p:pic>
         <p:nvPicPr>
-          <p:cNvPr id="10" name="Image 0" descr="/var/folders/6c/210dcgxn4gz5sm71vld2cy1h0000gn/T/tmp.LHO6BoqOp1/img/chaoshi.png">    </p:cNvPr>
+          <p:cNvPr id="10" name="Image 0" descr="/var/folders/6c/210dcgxn4gz5sm71vld2cy1h0000gn/T/tmp.kuKuqUEQz8/img/chaoshi.png">    </p:cNvPr>
           <p:cNvPicPr>
             <a:picLocks noChangeAspect="1"/>
           </p:cNvPicPr>
@@ -8642,7 +8642,7 @@
       </p:sp>
       <p:pic>
         <p:nvPicPr>
-          <p:cNvPr id="13" name="Image 1" descr="/var/folders/6c/210dcgxn4gz5sm71vld2cy1h0000gn/T/tmp.LHO6BoqOp1/img/yuan.png">    </p:cNvPr>
+          <p:cNvPr id="13" name="Image 1" descr="/var/folders/6c/210dcgxn4gz5sm71vld2cy1h0000gn/T/tmp.kuKuqUEQz8/img/yuan.png">    </p:cNvPr>
           <p:cNvPicPr>
             <a:picLocks noChangeAspect="1"/>
           </p:cNvPicPr>
@@ -8741,7 +8741,7 @@
       </p:sp>
       <p:pic>
         <p:nvPicPr>
-          <p:cNvPr id="16" name="Image 2" descr="/var/folders/6c/210dcgxn4gz5sm71vld2cy1h0000gn/T/tmp.LHO6BoqOp1/img/li.png">    </p:cNvPr>
+          <p:cNvPr id="16" name="Image 2" descr="/var/folders/6c/210dcgxn4gz5sm71vld2cy1h0000gn/T/tmp.kuKuqUEQz8/img/li.png">    </p:cNvPr>
           <p:cNvPicPr>
             <a:picLocks noChangeAspect="1"/>
           </p:cNvPicPr>
@@ -9195,7 +9195,7 @@
       </p:sp>
       <p:pic>
         <p:nvPicPr>
-          <p:cNvPr id="9" name="Image 0" descr="/var/folders/6c/210dcgxn4gz5sm71vld2cy1h0000gn/T/tmp.LHO6BoqOp1/img/tijie.png">    </p:cNvPr>
+          <p:cNvPr id="9" name="Image 0" descr="/var/folders/6c/210dcgxn4gz5sm71vld2cy1h0000gn/T/tmp.kuKuqUEQz8/img/tijie.png">    </p:cNvPr>
           <p:cNvPicPr>
             <a:picLocks noChangeAspect="1"/>
           </p:cNvPicPr>
@@ -11550,8 +11550,8 @@
         </p:nvSpPr>
         <p:spPr>
           <a:xfrm>
-            <a:off x="507950" y="176213"/>
-            <a:ext cx="2644893" cy="180975"/>
+            <a:off x="507950" y="180975"/>
+            <a:ext cx="2386370" cy="171450"/>
           </a:xfrm>
           <a:prstGeom prst="rect">
             <a:avLst/>
@@ -11589,8 +11589,8 @@
         </p:nvSpPr>
         <p:spPr>
           <a:xfrm>
-            <a:off x="3386435" y="166688"/>
-            <a:ext cx="1039710" cy="200025"/>
+            <a:off x="3132981" y="166688"/>
+            <a:ext cx="943466" cy="200025"/>
           </a:xfrm>
           <a:prstGeom prst="rect">
             <a:avLst/>
@@ -11628,8 +11628,8 @@
         </p:nvSpPr>
         <p:spPr>
           <a:xfrm>
-            <a:off x="11207800" y="176213"/>
-            <a:ext cx="485775" cy="180975"/>
+            <a:off x="11244709" y="180975"/>
+            <a:ext cx="448127" cy="171450"/>
           </a:xfrm>
           <a:prstGeom prst="rect">
             <a:avLst/>
@@ -11697,7 +11697,7 @@
         </p:nvSpPr>
         <p:spPr>
           <a:xfrm>
-            <a:off x="609600" y="1622971"/>
+            <a:off x="609600" y="1608683"/>
             <a:ext cx="11192256" cy="200025"/>
           </a:xfrm>
           <a:prstGeom prst="rect">
@@ -11736,12 +11736,12 @@
         </p:nvSpPr>
         <p:spPr>
           <a:xfrm>
-            <a:off x="609600" y="1822996"/>
-            <a:ext cx="10972800" cy="925711"/>
+            <a:off x="609600" y="1808708"/>
+            <a:ext cx="10972800" cy="935236"/>
           </a:xfrm>
           <a:prstGeom prst="roundRect">
             <a:avLst>
-              <a:gd name="adj" fmla="val 6860"/>
+              <a:gd name="adj" fmla="val 6790"/>
             </a:avLst>
           </a:prstGeom>
           <a:solidFill>
@@ -11772,7 +11772,7 @@
         </p:nvSpPr>
         <p:spPr>
           <a:xfrm>
-            <a:off x="822275" y="1984921"/>
+            <a:off x="822275" y="1970633"/>
             <a:ext cx="297841" cy="350490"/>
           </a:xfrm>
           <a:prstGeom prst="rect">
@@ -11814,8 +11814,8 @@
         </p:nvSpPr>
         <p:spPr>
           <a:xfrm>
-            <a:off x="1279327" y="1984921"/>
-            <a:ext cx="3786161" cy="284411"/>
+            <a:off x="1279327" y="1970633"/>
+            <a:ext cx="3730297" cy="284411"/>
           </a:xfrm>
           <a:prstGeom prst="rect">
             <a:avLst/>
@@ -11856,8 +11856,8 @@
         </p:nvSpPr>
         <p:spPr>
           <a:xfrm>
-            <a:off x="1279327" y="2320082"/>
-            <a:ext cx="3786161" cy="266700"/>
+            <a:off x="1279327" y="2305794"/>
+            <a:ext cx="3730297" cy="276225"/>
           </a:xfrm>
           <a:prstGeom prst="rect">
             <a:avLst/>
@@ -11898,12 +11898,12 @@
         </p:nvSpPr>
         <p:spPr>
           <a:xfrm>
-            <a:off x="609600" y="2901107"/>
-            <a:ext cx="10972800" cy="925711"/>
+            <a:off x="609600" y="2896344"/>
+            <a:ext cx="10972800" cy="935236"/>
           </a:xfrm>
           <a:prstGeom prst="roundRect">
             <a:avLst>
-              <a:gd name="adj" fmla="val 6860"/>
+              <a:gd name="adj" fmla="val 6790"/>
             </a:avLst>
           </a:prstGeom>
           <a:solidFill>
@@ -11934,7 +11934,7 @@
         </p:nvSpPr>
         <p:spPr>
           <a:xfrm>
-            <a:off x="822275" y="3063032"/>
+            <a:off x="822275" y="3058269"/>
             <a:ext cx="297841" cy="350490"/>
           </a:xfrm>
           <a:prstGeom prst="rect">
@@ -11976,8 +11976,8 @@
         </p:nvSpPr>
         <p:spPr>
           <a:xfrm>
-            <a:off x="1279327" y="3063032"/>
-            <a:ext cx="3155109" cy="284411"/>
+            <a:off x="1279327" y="3058269"/>
+            <a:ext cx="3108505" cy="284411"/>
           </a:xfrm>
           <a:prstGeom prst="rect">
             <a:avLst/>
@@ -12018,8 +12018,8 @@
         </p:nvSpPr>
         <p:spPr>
           <a:xfrm>
-            <a:off x="1279327" y="3398193"/>
-            <a:ext cx="3155109" cy="266700"/>
+            <a:off x="1279327" y="3393430"/>
+            <a:ext cx="3108505" cy="276225"/>
           </a:xfrm>
           <a:prstGeom prst="rect">
             <a:avLst/>
@@ -12060,12 +12060,12 @@
         </p:nvSpPr>
         <p:spPr>
           <a:xfrm>
-            <a:off x="609600" y="3979218"/>
-            <a:ext cx="10972800" cy="925711"/>
+            <a:off x="609600" y="3983980"/>
+            <a:ext cx="10972800" cy="935236"/>
           </a:xfrm>
           <a:prstGeom prst="roundRect">
             <a:avLst>
-              <a:gd name="adj" fmla="val 6860"/>
+              <a:gd name="adj" fmla="val 6790"/>
             </a:avLst>
           </a:prstGeom>
           <a:solidFill>
@@ -12096,7 +12096,7 @@
         </p:nvSpPr>
         <p:spPr>
           <a:xfrm>
-            <a:off x="822275" y="4141143"/>
+            <a:off x="822275" y="4145905"/>
             <a:ext cx="297841" cy="350490"/>
           </a:xfrm>
           <a:prstGeom prst="rect">
@@ -12138,8 +12138,8 @@
         </p:nvSpPr>
         <p:spPr>
           <a:xfrm>
-            <a:off x="1279327" y="4141143"/>
-            <a:ext cx="5679317" cy="284411"/>
+            <a:off x="1279327" y="4145905"/>
+            <a:ext cx="5491838" cy="284411"/>
           </a:xfrm>
           <a:prstGeom prst="rect">
             <a:avLst/>
@@ -12202,8 +12202,8 @@
         </p:nvSpPr>
         <p:spPr>
           <a:xfrm>
-            <a:off x="1279327" y="4476304"/>
-            <a:ext cx="5679317" cy="266700"/>
+            <a:off x="1279327" y="4481066"/>
+            <a:ext cx="5491838" cy="276225"/>
           </a:xfrm>
           <a:prstGeom prst="rect">
             <a:avLst/>
@@ -12244,7 +12244,7 @@
         </p:nvSpPr>
         <p:spPr>
           <a:xfrm>
-            <a:off x="609600" y="5031879"/>
+            <a:off x="609600" y="5046166"/>
             <a:ext cx="11192256" cy="228600"/>
           </a:xfrm>
           <a:prstGeom prst="rect">
@@ -12915,8 +12915,8 @@
         </p:nvSpPr>
         <p:spPr>
           <a:xfrm>
-            <a:off x="507950" y="180975"/>
-            <a:ext cx="2386370" cy="171450"/>
+            <a:off x="507950" y="176213"/>
+            <a:ext cx="2644893" cy="180975"/>
           </a:xfrm>
           <a:prstGeom prst="rect">
             <a:avLst/>
@@ -12954,8 +12954,8 @@
         </p:nvSpPr>
         <p:spPr>
           <a:xfrm>
-            <a:off x="3132981" y="166688"/>
-            <a:ext cx="967451" cy="200025"/>
+            <a:off x="3386435" y="166688"/>
+            <a:ext cx="1046390" cy="200025"/>
           </a:xfrm>
           <a:prstGeom prst="rect">
             <a:avLst/>
@@ -12993,8 +12993,8 @@
         </p:nvSpPr>
         <p:spPr>
           <a:xfrm>
-            <a:off x="11244709" y="180975"/>
-            <a:ext cx="448127" cy="171450"/>
+            <a:off x="11183094" y="176213"/>
+            <a:ext cx="510975" cy="180975"/>
           </a:xfrm>
           <a:prstGeom prst="rect">
             <a:avLst/>
@@ -13062,7 +13062,7 @@
         </p:nvSpPr>
         <p:spPr>
           <a:xfrm>
-            <a:off x="609600" y="1696045"/>
+            <a:off x="609600" y="1691283"/>
             <a:ext cx="11192256" cy="200025"/>
           </a:xfrm>
           <a:prstGeom prst="rect">
@@ -13101,7 +13101,7 @@
         </p:nvSpPr>
         <p:spPr>
           <a:xfrm>
-            <a:off x="609600" y="1896070"/>
+            <a:off x="609600" y="1891308"/>
             <a:ext cx="10972800" cy="1877020"/>
           </a:xfrm>
           <a:prstGeom prst="roundRect">
@@ -13137,7 +13137,7 @@
         </p:nvSpPr>
         <p:spPr>
           <a:xfrm>
-            <a:off x="933450" y="2143720"/>
+            <a:off x="933450" y="2138958"/>
             <a:ext cx="10531602" cy="690860"/>
           </a:xfrm>
           <a:prstGeom prst="rect">
@@ -13179,7 +13179,7 @@
         </p:nvSpPr>
         <p:spPr>
           <a:xfrm>
-            <a:off x="933450" y="2834580"/>
+            <a:off x="933450" y="2829818"/>
             <a:ext cx="10531602" cy="345430"/>
           </a:xfrm>
           <a:prstGeom prst="rect">
@@ -13232,7 +13232,7 @@
         </p:nvSpPr>
         <p:spPr>
           <a:xfrm>
-            <a:off x="933450" y="3180011"/>
+            <a:off x="933450" y="3175248"/>
             <a:ext cx="10531602" cy="345430"/>
           </a:xfrm>
           <a:prstGeom prst="rect">
@@ -13274,12 +13274,12 @@
         </p:nvSpPr>
         <p:spPr>
           <a:xfrm>
-            <a:off x="609600" y="3950791"/>
-            <a:ext cx="10972800" cy="1236464"/>
+            <a:off x="609600" y="3946029"/>
+            <a:ext cx="10972800" cy="1245989"/>
           </a:xfrm>
           <a:prstGeom prst="roundRect">
             <a:avLst>
-              <a:gd name="adj" fmla="val 5136"/>
+              <a:gd name="adj" fmla="val 5096"/>
             </a:avLst>
           </a:prstGeom>
           <a:solidFill>
@@ -13312,8 +13312,8 @@
         </p:nvSpPr>
         <p:spPr>
           <a:xfrm>
-            <a:off x="857250" y="4147542"/>
-            <a:ext cx="10687050" cy="190500"/>
+            <a:off x="857250" y="4142780"/>
+            <a:ext cx="10687050" cy="200025"/>
           </a:xfrm>
           <a:prstGeom prst="rect">
             <a:avLst/>
@@ -13354,7 +13354,7 @@
         </p:nvSpPr>
         <p:spPr>
           <a:xfrm>
-            <a:off x="857250" y="4401443"/>
+            <a:off x="857250" y="4406205"/>
             <a:ext cx="10687050" cy="589062"/>
           </a:xfrm>
           <a:prstGeom prst="rect">
@@ -18294,7 +18294,7 @@
       </p:sp>
       <p:pic>
         <p:nvPicPr>
-          <p:cNvPr id="10" name="Image 0" descr="/var/folders/6c/210dcgxn4gz5sm71vld2cy1h0000gn/T/tmp.LHO6BoqOp1/img/chaoshi.png">    </p:cNvPr>
+          <p:cNvPr id="10" name="Image 0" descr="/var/folders/6c/210dcgxn4gz5sm71vld2cy1h0000gn/T/tmp.kuKuqUEQz8/img/chaoshi.png">    </p:cNvPr>
           <p:cNvPicPr>
             <a:picLocks noChangeAspect="1"/>
           </p:cNvPicPr>
@@ -18474,7 +18474,7 @@
       </p:sp>
       <p:pic>
         <p:nvPicPr>
-          <p:cNvPr id="15" name="Image 1" descr="/var/folders/6c/210dcgxn4gz5sm71vld2cy1h0000gn/T/tmp.LHO6BoqOp1/img/yuan.png">    </p:cNvPr>
+          <p:cNvPr id="15" name="Image 1" descr="/var/folders/6c/210dcgxn4gz5sm71vld2cy1h0000gn/T/tmp.kuKuqUEQz8/img/yuan.png">    </p:cNvPr>
           <p:cNvPicPr>
             <a:picLocks noChangeAspect="1"/>
           </p:cNvPicPr>
@@ -20213,7 +20213,7 @@
       </p:sp>
       <p:pic>
         <p:nvPicPr>
-          <p:cNvPr id="10" name="Image 0" descr="/var/folders/6c/210dcgxn4gz5sm71vld2cy1h0000gn/T/tmp.LHO6BoqOp1/img/li.png">    </p:cNvPr>
+          <p:cNvPr id="10" name="Image 0" descr="/var/folders/6c/210dcgxn4gz5sm71vld2cy1h0000gn/T/tmp.kuKuqUEQz8/img/li.png">    </p:cNvPr>
           <p:cNvPicPr>
             <a:picLocks noChangeAspect="1"/>
           </p:cNvPicPr>
@@ -20604,8 +20604,8 @@
         </p:nvSpPr>
         <p:spPr>
           <a:xfrm>
-            <a:off x="507950" y="180975"/>
-            <a:ext cx="1264837" cy="171450"/>
+            <a:off x="507950" y="176213"/>
+            <a:ext cx="1371404" cy="180975"/>
           </a:xfrm>
           <a:prstGeom prst="rect">
             <a:avLst/>
@@ -20643,8 +20643,8 @@
         </p:nvSpPr>
         <p:spPr>
           <a:xfrm>
-            <a:off x="2033439" y="166688"/>
-            <a:ext cx="1520931" cy="200025"/>
+            <a:off x="2137916" y="166688"/>
+            <a:ext cx="1648295" cy="200025"/>
           </a:xfrm>
           <a:prstGeom prst="rect">
             <a:avLst/>
@@ -20682,8 +20682,8 @@
         </p:nvSpPr>
         <p:spPr>
           <a:xfrm>
-            <a:off x="11322397" y="180975"/>
-            <a:ext cx="368885" cy="171450"/>
+            <a:off x="11264652" y="176213"/>
+            <a:ext cx="427786" cy="180975"/>
           </a:xfrm>
           <a:prstGeom prst="rect">
             <a:avLst/>
@@ -20751,7 +20751,7 @@
         </p:nvSpPr>
         <p:spPr>
           <a:xfrm>
-            <a:off x="609600" y="1409551"/>
+            <a:off x="609600" y="1395264"/>
             <a:ext cx="11192256" cy="200025"/>
           </a:xfrm>
           <a:prstGeom prst="rect">
@@ -20790,8 +20790,8 @@
         </p:nvSpPr>
         <p:spPr>
           <a:xfrm>
-            <a:off x="609600" y="1685776"/>
-            <a:ext cx="10972800" cy="1042541"/>
+            <a:off x="609600" y="1671489"/>
+            <a:ext cx="10972800" cy="1052066"/>
           </a:xfrm>
           <a:prstGeom prst="rect">
             <a:avLst/>
@@ -20820,8 +20820,8 @@
         </p:nvSpPr>
         <p:spPr>
           <a:xfrm>
-            <a:off x="633412" y="1685776"/>
-            <a:ext cx="0" cy="1042541"/>
+            <a:off x="633412" y="1671489"/>
+            <a:ext cx="0" cy="1052066"/>
           </a:xfrm>
           <a:prstGeom prst="line">
             <a:avLst/>
@@ -20843,7 +20843,7 @@
         </p:nvSpPr>
         <p:spPr>
           <a:xfrm>
-            <a:off x="885825" y="1838176"/>
+            <a:off x="885825" y="1823889"/>
             <a:ext cx="10677335" cy="445740"/>
           </a:xfrm>
           <a:prstGeom prst="rect">
@@ -20907,8 +20907,8 @@
         </p:nvSpPr>
         <p:spPr>
           <a:xfrm>
-            <a:off x="885825" y="2347317"/>
-            <a:ext cx="10677335" cy="228600"/>
+            <a:off x="885825" y="2333030"/>
+            <a:ext cx="10677335" cy="238125"/>
           </a:xfrm>
           <a:prstGeom prst="rect">
             <a:avLst/>
@@ -20949,8 +20949,8 @@
         </p:nvSpPr>
         <p:spPr>
           <a:xfrm>
-            <a:off x="609600" y="2880717"/>
-            <a:ext cx="10972800" cy="1042541"/>
+            <a:off x="609600" y="2875955"/>
+            <a:ext cx="10972800" cy="1052066"/>
           </a:xfrm>
           <a:prstGeom prst="rect">
             <a:avLst/>
@@ -20979,8 +20979,8 @@
         </p:nvSpPr>
         <p:spPr>
           <a:xfrm>
-            <a:off x="633412" y="2880717"/>
-            <a:ext cx="0" cy="1042541"/>
+            <a:off x="633412" y="2875955"/>
+            <a:ext cx="0" cy="1052066"/>
           </a:xfrm>
           <a:prstGeom prst="line">
             <a:avLst/>
@@ -21002,7 +21002,7 @@
         </p:nvSpPr>
         <p:spPr>
           <a:xfrm>
-            <a:off x="885825" y="3033117"/>
+            <a:off x="885825" y="3028355"/>
             <a:ext cx="10677335" cy="445740"/>
           </a:xfrm>
           <a:prstGeom prst="rect">
@@ -21066,8 +21066,8 @@
         </p:nvSpPr>
         <p:spPr>
           <a:xfrm>
-            <a:off x="885825" y="3542258"/>
-            <a:ext cx="10677335" cy="228600"/>
+            <a:off x="885825" y="3537496"/>
+            <a:ext cx="10677335" cy="238125"/>
           </a:xfrm>
           <a:prstGeom prst="rect">
             <a:avLst/>
@@ -21108,8 +21108,8 @@
         </p:nvSpPr>
         <p:spPr>
           <a:xfrm>
-            <a:off x="609600" y="4075658"/>
-            <a:ext cx="10972800" cy="1042541"/>
+            <a:off x="609600" y="4080421"/>
+            <a:ext cx="10972800" cy="1052066"/>
           </a:xfrm>
           <a:prstGeom prst="rect">
             <a:avLst/>
@@ -21140,8 +21140,8 @@
         </p:nvSpPr>
         <p:spPr>
           <a:xfrm>
-            <a:off x="633412" y="4075658"/>
-            <a:ext cx="0" cy="1042541"/>
+            <a:off x="633412" y="4080421"/>
+            <a:ext cx="0" cy="1052066"/>
           </a:xfrm>
           <a:prstGeom prst="line">
             <a:avLst/>
@@ -21163,7 +21163,7 @@
         </p:nvSpPr>
         <p:spPr>
           <a:xfrm>
-            <a:off x="885825" y="4228058"/>
+            <a:off x="885825" y="4232821"/>
             <a:ext cx="10677335" cy="445740"/>
           </a:xfrm>
           <a:prstGeom prst="rect">
@@ -21249,8 +21249,8 @@
         </p:nvSpPr>
         <p:spPr>
           <a:xfrm>
-            <a:off x="885825" y="4737199"/>
-            <a:ext cx="10677335" cy="228600"/>
+            <a:off x="885825" y="4741962"/>
+            <a:ext cx="10677335" cy="238125"/>
           </a:xfrm>
           <a:prstGeom prst="rect">
             <a:avLst/>
@@ -21291,7 +21291,7 @@
         </p:nvSpPr>
         <p:spPr>
           <a:xfrm>
-            <a:off x="609600" y="5245150"/>
+            <a:off x="609600" y="5259437"/>
             <a:ext cx="11192256" cy="228600"/>
           </a:xfrm>
           <a:prstGeom prst="rect">
